--- a/Share/2. 기획 스크립트/[T] 2. 로그인 프로세스 변경.pptx
+++ b/Share/2. 기획 스크립트/[T] 2. 로그인 프로세스 변경.pptx
@@ -12,6 +12,7 @@
     <p:sldId id="261" r:id="rId6"/>
     <p:sldId id="262" r:id="rId7"/>
     <p:sldId id="263" r:id="rId8"/>
+    <p:sldId id="264" r:id="rId9"/>
   </p:sldIdLst>
   <p:sldSz cx="12192000" cy="6858000"/>
   <p:notesSz cx="6858000" cy="9144000"/>
@@ -110,6 +111,11 @@
       </a:defRPr>
     </a:lvl9pPr>
   </p:defaultTextStyle>
+  <p:extLst>
+    <p:ext uri="{EFAFB233-063F-42B5-8137-9DF3F51BA10A}">
+      <p15:sldGuideLst xmlns:p15="http://schemas.microsoft.com/office/powerpoint/2012/main"/>
+    </p:ext>
+  </p:extLst>
 </p:presentation>
 </file>
 
@@ -260,7 +266,7 @@
           <a:p>
             <a:fld id="{62DA3764-DD0C-4BFF-AAF9-73EA21321E38}" type="datetimeFigureOut">
               <a:rPr lang="ko-KR" altLang="en-US" smtClean="0"/>
-              <a:t>2025-07-04</a:t>
+              <a:t>2025-07-05</a:t>
             </a:fld>
             <a:endParaRPr lang="ko-KR" altLang="en-US"/>
           </a:p>
@@ -458,7 +464,7 @@
           <a:p>
             <a:fld id="{62DA3764-DD0C-4BFF-AAF9-73EA21321E38}" type="datetimeFigureOut">
               <a:rPr lang="ko-KR" altLang="en-US" smtClean="0"/>
-              <a:t>2025-07-04</a:t>
+              <a:t>2025-07-05</a:t>
             </a:fld>
             <a:endParaRPr lang="ko-KR" altLang="en-US"/>
           </a:p>
@@ -666,7 +672,7 @@
           <a:p>
             <a:fld id="{62DA3764-DD0C-4BFF-AAF9-73EA21321E38}" type="datetimeFigureOut">
               <a:rPr lang="ko-KR" altLang="en-US" smtClean="0"/>
-              <a:t>2025-07-04</a:t>
+              <a:t>2025-07-05</a:t>
             </a:fld>
             <a:endParaRPr lang="ko-KR" altLang="en-US"/>
           </a:p>
@@ -864,7 +870,7 @@
           <a:p>
             <a:fld id="{62DA3764-DD0C-4BFF-AAF9-73EA21321E38}" type="datetimeFigureOut">
               <a:rPr lang="ko-KR" altLang="en-US" smtClean="0"/>
-              <a:t>2025-07-04</a:t>
+              <a:t>2025-07-05</a:t>
             </a:fld>
             <a:endParaRPr lang="ko-KR" altLang="en-US"/>
           </a:p>
@@ -1139,7 +1145,7 @@
           <a:p>
             <a:fld id="{62DA3764-DD0C-4BFF-AAF9-73EA21321E38}" type="datetimeFigureOut">
               <a:rPr lang="ko-KR" altLang="en-US" smtClean="0"/>
-              <a:t>2025-07-04</a:t>
+              <a:t>2025-07-05</a:t>
             </a:fld>
             <a:endParaRPr lang="ko-KR" altLang="en-US"/>
           </a:p>
@@ -1404,7 +1410,7 @@
           <a:p>
             <a:fld id="{62DA3764-DD0C-4BFF-AAF9-73EA21321E38}" type="datetimeFigureOut">
               <a:rPr lang="ko-KR" altLang="en-US" smtClean="0"/>
-              <a:t>2025-07-04</a:t>
+              <a:t>2025-07-05</a:t>
             </a:fld>
             <a:endParaRPr lang="ko-KR" altLang="en-US"/>
           </a:p>
@@ -1816,7 +1822,7 @@
           <a:p>
             <a:fld id="{62DA3764-DD0C-4BFF-AAF9-73EA21321E38}" type="datetimeFigureOut">
               <a:rPr lang="ko-KR" altLang="en-US" smtClean="0"/>
-              <a:t>2025-07-04</a:t>
+              <a:t>2025-07-05</a:t>
             </a:fld>
             <a:endParaRPr lang="ko-KR" altLang="en-US"/>
           </a:p>
@@ -1957,7 +1963,7 @@
           <a:p>
             <a:fld id="{62DA3764-DD0C-4BFF-AAF9-73EA21321E38}" type="datetimeFigureOut">
               <a:rPr lang="ko-KR" altLang="en-US" smtClean="0"/>
-              <a:t>2025-07-04</a:t>
+              <a:t>2025-07-05</a:t>
             </a:fld>
             <a:endParaRPr lang="ko-KR" altLang="en-US"/>
           </a:p>
@@ -2070,7 +2076,7 @@
           <a:p>
             <a:fld id="{62DA3764-DD0C-4BFF-AAF9-73EA21321E38}" type="datetimeFigureOut">
               <a:rPr lang="ko-KR" altLang="en-US" smtClean="0"/>
-              <a:t>2025-07-04</a:t>
+              <a:t>2025-07-05</a:t>
             </a:fld>
             <a:endParaRPr lang="ko-KR" altLang="en-US"/>
           </a:p>
@@ -2381,7 +2387,7 @@
           <a:p>
             <a:fld id="{62DA3764-DD0C-4BFF-AAF9-73EA21321E38}" type="datetimeFigureOut">
               <a:rPr lang="ko-KR" altLang="en-US" smtClean="0"/>
-              <a:t>2025-07-04</a:t>
+              <a:t>2025-07-05</a:t>
             </a:fld>
             <a:endParaRPr lang="ko-KR" altLang="en-US"/>
           </a:p>
@@ -2669,7 +2675,7 @@
           <a:p>
             <a:fld id="{62DA3764-DD0C-4BFF-AAF9-73EA21321E38}" type="datetimeFigureOut">
               <a:rPr lang="ko-KR" altLang="en-US" smtClean="0"/>
-              <a:t>2025-07-04</a:t>
+              <a:t>2025-07-05</a:t>
             </a:fld>
             <a:endParaRPr lang="ko-KR" altLang="en-US"/>
           </a:p>
@@ -2910,7 +2916,7 @@
           <a:p>
             <a:fld id="{62DA3764-DD0C-4BFF-AAF9-73EA21321E38}" type="datetimeFigureOut">
               <a:rPr lang="ko-KR" altLang="en-US" smtClean="0"/>
-              <a:t>2025-07-04</a:t>
+              <a:t>2025-07-05</a:t>
             </a:fld>
             <a:endParaRPr lang="ko-KR" altLang="en-US"/>
           </a:p>
@@ -6383,6 +6389,546 @@
     <p:extLst>
       <p:ext uri="{BB962C8B-B14F-4D97-AF65-F5344CB8AC3E}">
         <p14:creationId xmlns:p14="http://schemas.microsoft.com/office/powerpoint/2010/main" val="4180341824"/>
+      </p:ext>
+    </p:extLst>
+  </p:cSld>
+  <p:clrMapOvr>
+    <a:masterClrMapping/>
+  </p:clrMapOvr>
+</p:sld>
+</file>
+
+<file path=ppt/slides/slide8.xml><?xml version="1.0" encoding="utf-8"?>
+<p:sld xmlns:a="http://schemas.openxmlformats.org/drawingml/2006/main" xmlns:r="http://schemas.openxmlformats.org/officeDocument/2006/relationships" xmlns:p="http://schemas.openxmlformats.org/presentationml/2006/main">
+  <p:cSld>
+    <p:spTree>
+      <p:nvGrpSpPr>
+        <p:cNvPr id="1" name="">
+          <a:extLst>
+            <a:ext uri="{FF2B5EF4-FFF2-40B4-BE49-F238E27FC236}">
+              <a16:creationId xmlns:a16="http://schemas.microsoft.com/office/drawing/2014/main" id="{BB0B883C-7604-C571-F0F8-1F8AEFDE51B4}"/>
+            </a:ext>
+          </a:extLst>
+        </p:cNvPr>
+        <p:cNvGrpSpPr/>
+        <p:nvPr/>
+      </p:nvGrpSpPr>
+      <p:grpSpPr>
+        <a:xfrm>
+          <a:off x="0" y="0"/>
+          <a:ext cx="0" cy="0"/>
+          <a:chOff x="0" y="0"/>
+          <a:chExt cx="0" cy="0"/>
+        </a:xfrm>
+      </p:grpSpPr>
+      <p:sp>
+        <p:nvSpPr>
+          <p:cNvPr id="4" name="TextBox 3">
+            <a:extLst>
+              <a:ext uri="{FF2B5EF4-FFF2-40B4-BE49-F238E27FC236}">
+                <a16:creationId xmlns:a16="http://schemas.microsoft.com/office/drawing/2014/main" id="{FAEB444F-DB2C-BE3B-9192-651746FE9AC4}"/>
+              </a:ext>
+            </a:extLst>
+          </p:cNvPr>
+          <p:cNvSpPr txBox="1"/>
+          <p:nvPr/>
+        </p:nvSpPr>
+        <p:spPr>
+          <a:xfrm>
+            <a:off x="432391" y="389860"/>
+            <a:ext cx="1651414" cy="646331"/>
+          </a:xfrm>
+          <a:prstGeom prst="rect">
+            <a:avLst/>
+          </a:prstGeom>
+          <a:noFill/>
+        </p:spPr>
+        <p:txBody>
+          <a:bodyPr wrap="none" rtlCol="0">
+            <a:spAutoFit/>
+          </a:bodyPr>
+          <a:lstStyle/>
+          <a:p>
+            <a:r>
+              <a:rPr lang="ko-KR" altLang="en-US" b="1" dirty="0"/>
+              <a:t>변경되는 방식</a:t>
+            </a:r>
+            <a:endParaRPr lang="en-US" altLang="ko-KR" b="1" dirty="0"/>
+          </a:p>
+          <a:p>
+            <a:endParaRPr lang="ko-KR" altLang="en-US" b="1" dirty="0"/>
+          </a:p>
+        </p:txBody>
+      </p:sp>
+      <p:pic>
+        <p:nvPicPr>
+          <p:cNvPr id="7" name="그림 6">
+            <a:extLst>
+              <a:ext uri="{FF2B5EF4-FFF2-40B4-BE49-F238E27FC236}">
+                <a16:creationId xmlns:a16="http://schemas.microsoft.com/office/drawing/2014/main" id="{0E3E34B0-1D8D-3A11-D309-601050E640CF}"/>
+              </a:ext>
+            </a:extLst>
+          </p:cNvPr>
+          <p:cNvPicPr>
+            <a:picLocks noChangeAspect="1"/>
+          </p:cNvPicPr>
+          <p:nvPr/>
+        </p:nvPicPr>
+        <p:blipFill>
+          <a:blip r:embed="rId2"/>
+          <a:stretch>
+            <a:fillRect/>
+          </a:stretch>
+        </p:blipFill>
+        <p:spPr>
+          <a:xfrm>
+            <a:off x="571407" y="901408"/>
+            <a:ext cx="6087325" cy="5239481"/>
+          </a:xfrm>
+          <a:prstGeom prst="rect">
+            <a:avLst/>
+          </a:prstGeom>
+        </p:spPr>
+      </p:pic>
+      <p:sp>
+        <p:nvSpPr>
+          <p:cNvPr id="21" name="TextBox 20">
+            <a:extLst>
+              <a:ext uri="{FF2B5EF4-FFF2-40B4-BE49-F238E27FC236}">
+                <a16:creationId xmlns:a16="http://schemas.microsoft.com/office/drawing/2014/main" id="{6FADD25D-39EE-654A-7D3B-F2933329EA01}"/>
+              </a:ext>
+            </a:extLst>
+          </p:cNvPr>
+          <p:cNvSpPr txBox="1"/>
+          <p:nvPr/>
+        </p:nvSpPr>
+        <p:spPr>
+          <a:xfrm>
+            <a:off x="6889898" y="1036191"/>
+            <a:ext cx="184731" cy="646331"/>
+          </a:xfrm>
+          <a:prstGeom prst="rect">
+            <a:avLst/>
+          </a:prstGeom>
+          <a:noFill/>
+        </p:spPr>
+        <p:txBody>
+          <a:bodyPr wrap="none" rtlCol="0">
+            <a:spAutoFit/>
+          </a:bodyPr>
+          <a:lstStyle/>
+          <a:p>
+            <a:endParaRPr lang="ko-KR" altLang="en-US" dirty="0"/>
+          </a:p>
+          <a:p>
+            <a:endParaRPr lang="ko-KR" altLang="en-US" dirty="0"/>
+          </a:p>
+        </p:txBody>
+      </p:sp>
+      <p:pic>
+        <p:nvPicPr>
+          <p:cNvPr id="28" name="그림 27">
+            <a:extLst>
+              <a:ext uri="{FF2B5EF4-FFF2-40B4-BE49-F238E27FC236}">
+                <a16:creationId xmlns:a16="http://schemas.microsoft.com/office/drawing/2014/main" id="{436D127E-758E-ABDE-991A-00DF7A80DD74}"/>
+              </a:ext>
+            </a:extLst>
+          </p:cNvPr>
+          <p:cNvPicPr>
+            <a:picLocks noChangeAspect="1"/>
+          </p:cNvPicPr>
+          <p:nvPr/>
+        </p:nvPicPr>
+        <p:blipFill>
+          <a:blip r:embed="rId3"/>
+          <a:stretch>
+            <a:fillRect/>
+          </a:stretch>
+        </p:blipFill>
+        <p:spPr>
+          <a:xfrm>
+            <a:off x="2626355" y="3609743"/>
+            <a:ext cx="1651414" cy="1219324"/>
+          </a:xfrm>
+          <a:prstGeom prst="rect">
+            <a:avLst/>
+          </a:prstGeom>
+        </p:spPr>
+      </p:pic>
+      <p:pic>
+        <p:nvPicPr>
+          <p:cNvPr id="30" name="그림 29">
+            <a:extLst>
+              <a:ext uri="{FF2B5EF4-FFF2-40B4-BE49-F238E27FC236}">
+                <a16:creationId xmlns:a16="http://schemas.microsoft.com/office/drawing/2014/main" id="{4F2658AC-0CB1-66CF-C2E9-C7478645F8B7}"/>
+              </a:ext>
+            </a:extLst>
+          </p:cNvPr>
+          <p:cNvPicPr>
+            <a:picLocks noChangeAspect="1"/>
+          </p:cNvPicPr>
+          <p:nvPr/>
+        </p:nvPicPr>
+        <p:blipFill>
+          <a:blip r:embed="rId4"/>
+          <a:stretch>
+            <a:fillRect/>
+          </a:stretch>
+        </p:blipFill>
+        <p:spPr>
+          <a:xfrm>
+            <a:off x="2556587" y="3609743"/>
+            <a:ext cx="1790950" cy="409632"/>
+          </a:xfrm>
+          <a:prstGeom prst="rect">
+            <a:avLst/>
+          </a:prstGeom>
+        </p:spPr>
+      </p:pic>
+      <p:pic>
+        <p:nvPicPr>
+          <p:cNvPr id="32" name="그림 31">
+            <a:extLst>
+              <a:ext uri="{FF2B5EF4-FFF2-40B4-BE49-F238E27FC236}">
+                <a16:creationId xmlns:a16="http://schemas.microsoft.com/office/drawing/2014/main" id="{9DFAB490-BE78-DA2D-EA69-9D0148D74C64}"/>
+              </a:ext>
+            </a:extLst>
+          </p:cNvPr>
+          <p:cNvPicPr>
+            <a:picLocks noChangeAspect="1"/>
+          </p:cNvPicPr>
+          <p:nvPr/>
+        </p:nvPicPr>
+        <p:blipFill>
+          <a:blip r:embed="rId5"/>
+          <a:stretch>
+            <a:fillRect/>
+          </a:stretch>
+        </p:blipFill>
+        <p:spPr>
+          <a:xfrm>
+            <a:off x="2556587" y="4508552"/>
+            <a:ext cx="1790950" cy="381053"/>
+          </a:xfrm>
+          <a:prstGeom prst="rect">
+            <a:avLst/>
+          </a:prstGeom>
+        </p:spPr>
+      </p:pic>
+      <p:sp>
+        <p:nvSpPr>
+          <p:cNvPr id="33" name="TextBox 32">
+            <a:extLst>
+              <a:ext uri="{FF2B5EF4-FFF2-40B4-BE49-F238E27FC236}">
+                <a16:creationId xmlns:a16="http://schemas.microsoft.com/office/drawing/2014/main" id="{F339DA31-D3EC-E9F8-AB7D-2134DA82FCF8}"/>
+              </a:ext>
+            </a:extLst>
+          </p:cNvPr>
+          <p:cNvSpPr txBox="1"/>
+          <p:nvPr/>
+        </p:nvSpPr>
+        <p:spPr>
+          <a:xfrm>
+            <a:off x="7074629" y="1036191"/>
+            <a:ext cx="5093061" cy="1754326"/>
+          </a:xfrm>
+          <a:prstGeom prst="rect">
+            <a:avLst/>
+          </a:prstGeom>
+          <a:noFill/>
+        </p:spPr>
+        <p:txBody>
+          <a:bodyPr wrap="none" rtlCol="0">
+            <a:spAutoFit/>
+          </a:bodyPr>
+          <a:lstStyle/>
+          <a:p>
+            <a:pPr marL="342900" indent="-342900">
+              <a:buAutoNum type="arabicPeriod"/>
+            </a:pPr>
+            <a:r>
+              <a:rPr lang="ko-KR" altLang="en-US" dirty="0"/>
+              <a:t>로컬서버 버튼 추가</a:t>
+            </a:r>
+            <a:endParaRPr lang="en-US" altLang="ko-KR" dirty="0"/>
+          </a:p>
+          <a:p>
+            <a:pPr marL="342900" indent="-342900">
+              <a:buAutoNum type="arabicPeriod"/>
+            </a:pPr>
+            <a:endParaRPr lang="en-US" altLang="ko-KR" dirty="0"/>
+          </a:p>
+          <a:p>
+            <a:pPr marL="342900" indent="-342900">
+              <a:buFontTx/>
+              <a:buAutoNum type="arabicPeriod"/>
+            </a:pPr>
+            <a:r>
+              <a:rPr lang="ko-KR" altLang="en-US" dirty="0"/>
+              <a:t>로컬서버 체크 박스가 </a:t>
+            </a:r>
+            <a:r>
+              <a:rPr lang="en-US" altLang="ko-KR" dirty="0"/>
+              <a:t>On</a:t>
+            </a:r>
+            <a:r>
+              <a:rPr lang="ko-KR" altLang="en-US" dirty="0" err="1"/>
+              <a:t>일때는</a:t>
+            </a:r>
+            <a:r>
+              <a:rPr lang="ko-KR" altLang="en-US" dirty="0"/>
+              <a:t> 서버버튼을</a:t>
+            </a:r>
+            <a:endParaRPr lang="en-US" altLang="ko-KR" dirty="0"/>
+          </a:p>
+          <a:p>
+            <a:r>
+              <a:rPr lang="ko-KR" altLang="en-US" dirty="0" err="1"/>
+              <a:t>딤드</a:t>
+            </a:r>
+            <a:r>
+              <a:rPr lang="ko-KR" altLang="en-US" dirty="0"/>
+              <a:t> 처리하고</a:t>
+            </a:r>
+            <a:r>
+              <a:rPr lang="en-US" altLang="ko-KR" dirty="0"/>
+              <a:t>, </a:t>
+            </a:r>
+            <a:r>
+              <a:rPr lang="ko-KR" altLang="en-US" dirty="0"/>
+              <a:t>루프백주소 </a:t>
+            </a:r>
+            <a:r>
+              <a:rPr lang="en-US" altLang="ko-KR" dirty="0"/>
+              <a:t>127.0.0.1 </a:t>
+            </a:r>
+            <a:r>
+              <a:rPr lang="ko-KR" altLang="en-US" dirty="0"/>
+              <a:t>로만 연결</a:t>
+            </a:r>
+            <a:endParaRPr lang="en-US" altLang="ko-KR" dirty="0"/>
+          </a:p>
+          <a:p>
+            <a:r>
+              <a:rPr lang="ko-KR" altLang="en-US" dirty="0"/>
+              <a:t>하는 기능 추가</a:t>
+            </a:r>
+            <a:endParaRPr lang="en-US" altLang="ko-KR" dirty="0"/>
+          </a:p>
+          <a:p>
+            <a:pPr marL="342900" indent="-342900">
+              <a:buAutoNum type="arabicPeriod"/>
+            </a:pPr>
+            <a:endParaRPr lang="ko-KR" altLang="en-US" dirty="0"/>
+          </a:p>
+        </p:txBody>
+      </p:sp>
+      <p:sp>
+        <p:nvSpPr>
+          <p:cNvPr id="35" name="사각형: 둥근 모서리 34">
+            <a:extLst>
+              <a:ext uri="{FF2B5EF4-FFF2-40B4-BE49-F238E27FC236}">
+                <a16:creationId xmlns:a16="http://schemas.microsoft.com/office/drawing/2014/main" id="{E88E3852-F0CA-2024-4879-FF09FDE7D6B2}"/>
+              </a:ext>
+            </a:extLst>
+          </p:cNvPr>
+          <p:cNvSpPr/>
+          <p:nvPr/>
+        </p:nvSpPr>
+        <p:spPr>
+          <a:xfrm>
+            <a:off x="2626355" y="3685953"/>
+            <a:ext cx="1385664" cy="241005"/>
+          </a:xfrm>
+          <a:prstGeom prst="roundRect">
+            <a:avLst/>
+          </a:prstGeom>
+        </p:spPr>
+        <p:style>
+          <a:lnRef idx="1">
+            <a:schemeClr val="dk1"/>
+          </a:lnRef>
+          <a:fillRef idx="2">
+            <a:schemeClr val="dk1"/>
+          </a:fillRef>
+          <a:effectRef idx="1">
+            <a:schemeClr val="dk1"/>
+          </a:effectRef>
+          <a:fontRef idx="minor">
+            <a:schemeClr val="dk1"/>
+          </a:fontRef>
+        </p:style>
+        <p:txBody>
+          <a:bodyPr rtlCol="0" anchor="ctr"/>
+          <a:lstStyle/>
+          <a:p>
+            <a:pPr algn="ctr"/>
+            <a:r>
+              <a:rPr lang="en-US" altLang="ko-KR" dirty="0"/>
+              <a:t>Server</a:t>
+            </a:r>
+            <a:endParaRPr lang="ko-KR" altLang="en-US" dirty="0"/>
+          </a:p>
+        </p:txBody>
+      </p:sp>
+      <p:sp>
+        <p:nvSpPr>
+          <p:cNvPr id="2" name="사각형: 둥근 모서리 1">
+            <a:extLst>
+              <a:ext uri="{FF2B5EF4-FFF2-40B4-BE49-F238E27FC236}">
+                <a16:creationId xmlns:a16="http://schemas.microsoft.com/office/drawing/2014/main" id="{9855E761-ED9B-8DAE-9E85-51D99E62EC54}"/>
+              </a:ext>
+            </a:extLst>
+          </p:cNvPr>
+          <p:cNvSpPr/>
+          <p:nvPr/>
+        </p:nvSpPr>
+        <p:spPr>
+          <a:xfrm>
+            <a:off x="4347537" y="3685953"/>
+            <a:ext cx="316612" cy="241005"/>
+          </a:xfrm>
+          <a:prstGeom prst="roundRect">
+            <a:avLst/>
+          </a:prstGeom>
+        </p:spPr>
+        <p:style>
+          <a:lnRef idx="2">
+            <a:schemeClr val="dk1"/>
+          </a:lnRef>
+          <a:fillRef idx="1">
+            <a:schemeClr val="lt1"/>
+          </a:fillRef>
+          <a:effectRef idx="0">
+            <a:schemeClr val="dk1"/>
+          </a:effectRef>
+          <a:fontRef idx="minor">
+            <a:schemeClr val="dk1"/>
+          </a:fontRef>
+        </p:style>
+        <p:txBody>
+          <a:bodyPr rtlCol="0" anchor="ctr"/>
+          <a:lstStyle/>
+          <a:p>
+            <a:pPr algn="ctr"/>
+            <a:endParaRPr lang="ko-KR" altLang="en-US"/>
+          </a:p>
+        </p:txBody>
+      </p:sp>
+      <p:sp>
+        <p:nvSpPr>
+          <p:cNvPr id="3" name="L 도형 2">
+            <a:extLst>
+              <a:ext uri="{FF2B5EF4-FFF2-40B4-BE49-F238E27FC236}">
+                <a16:creationId xmlns:a16="http://schemas.microsoft.com/office/drawing/2014/main" id="{EF8BB928-06A7-5B7B-76D5-EF53C757DEF9}"/>
+              </a:ext>
+            </a:extLst>
+          </p:cNvPr>
+          <p:cNvSpPr/>
+          <p:nvPr/>
+        </p:nvSpPr>
+        <p:spPr>
+          <a:xfrm rot="20925846">
+            <a:off x="4475192" y="3343421"/>
+            <a:ext cx="517451" cy="370367"/>
+          </a:xfrm>
+          <a:prstGeom prst="corner">
+            <a:avLst>
+              <a:gd name="adj1" fmla="val 7895"/>
+              <a:gd name="adj2" fmla="val 7895"/>
+            </a:avLst>
+          </a:prstGeom>
+        </p:spPr>
+        <p:style>
+          <a:lnRef idx="2">
+            <a:schemeClr val="accent6">
+              <a:shade val="15000"/>
+            </a:schemeClr>
+          </a:lnRef>
+          <a:fillRef idx="1">
+            <a:schemeClr val="accent6"/>
+          </a:fillRef>
+          <a:effectRef idx="0">
+            <a:schemeClr val="accent6"/>
+          </a:effectRef>
+          <a:fontRef idx="minor">
+            <a:schemeClr val="lt1"/>
+          </a:fontRef>
+        </p:style>
+        <p:txBody>
+          <a:bodyPr rtlCol="0" anchor="ctr"/>
+          <a:lstStyle/>
+          <a:p>
+            <a:pPr algn="ctr"/>
+            <a:endParaRPr lang="ko-KR" altLang="en-US"/>
+          </a:p>
+        </p:txBody>
+      </p:sp>
+      <p:sp>
+        <p:nvSpPr>
+          <p:cNvPr id="5" name="TextBox 4">
+            <a:extLst>
+              <a:ext uri="{FF2B5EF4-FFF2-40B4-BE49-F238E27FC236}">
+                <a16:creationId xmlns:a16="http://schemas.microsoft.com/office/drawing/2014/main" id="{E05CA15F-215F-656C-FBA3-1634FFED9AFC}"/>
+              </a:ext>
+            </a:extLst>
+          </p:cNvPr>
+          <p:cNvSpPr txBox="1"/>
+          <p:nvPr/>
+        </p:nvSpPr>
+        <p:spPr>
+          <a:xfrm>
+            <a:off x="4733917" y="3244334"/>
+            <a:ext cx="713657" cy="369332"/>
+          </a:xfrm>
+          <a:prstGeom prst="rect">
+            <a:avLst/>
+          </a:prstGeom>
+          <a:noFill/>
+        </p:spPr>
+        <p:txBody>
+          <a:bodyPr wrap="none" rtlCol="0">
+            <a:spAutoFit/>
+          </a:bodyPr>
+          <a:lstStyle/>
+          <a:p>
+            <a:r>
+              <a:rPr lang="ko-KR" altLang="en-US" dirty="0">
+                <a:solidFill>
+                  <a:schemeClr val="accent6">
+                    <a:lumMod val="60000"/>
+                    <a:lumOff val="40000"/>
+                  </a:schemeClr>
+                </a:solidFill>
+              </a:rPr>
+              <a:t>클릭</a:t>
+            </a:r>
+            <a:r>
+              <a:rPr lang="en-US" altLang="ko-KR" dirty="0">
+                <a:solidFill>
+                  <a:schemeClr val="accent6">
+                    <a:lumMod val="60000"/>
+                    <a:lumOff val="40000"/>
+                  </a:schemeClr>
+                </a:solidFill>
+              </a:rPr>
+              <a:t>!</a:t>
+            </a:r>
+            <a:endParaRPr lang="ko-KR" altLang="en-US" dirty="0">
+              <a:solidFill>
+                <a:schemeClr val="accent6">
+                  <a:lumMod val="60000"/>
+                  <a:lumOff val="40000"/>
+                </a:schemeClr>
+              </a:solidFill>
+            </a:endParaRPr>
+          </a:p>
+        </p:txBody>
+      </p:sp>
+    </p:spTree>
+    <p:extLst>
+      <p:ext uri="{BB962C8B-B14F-4D97-AF65-F5344CB8AC3E}">
+        <p14:creationId xmlns:p14="http://schemas.microsoft.com/office/powerpoint/2010/main" val="3536442688"/>
       </p:ext>
     </p:extLst>
   </p:cSld>

--- a/Share/2. 기획 스크립트/[T] 2. 로그인 프로세스 변경.pptx
+++ b/Share/2. 기획 스크립트/[T] 2. 로그인 프로세스 변경.pptx
@@ -266,7 +266,7 @@
           <a:p>
             <a:fld id="{62DA3764-DD0C-4BFF-AAF9-73EA21321E38}" type="datetimeFigureOut">
               <a:rPr lang="ko-KR" altLang="en-US" smtClean="0"/>
-              <a:t>2025-07-05</a:t>
+              <a:t>2025-08-24</a:t>
             </a:fld>
             <a:endParaRPr lang="ko-KR" altLang="en-US"/>
           </a:p>
@@ -464,7 +464,7 @@
           <a:p>
             <a:fld id="{62DA3764-DD0C-4BFF-AAF9-73EA21321E38}" type="datetimeFigureOut">
               <a:rPr lang="ko-KR" altLang="en-US" smtClean="0"/>
-              <a:t>2025-07-05</a:t>
+              <a:t>2025-08-24</a:t>
             </a:fld>
             <a:endParaRPr lang="ko-KR" altLang="en-US"/>
           </a:p>
@@ -672,7 +672,7 @@
           <a:p>
             <a:fld id="{62DA3764-DD0C-4BFF-AAF9-73EA21321E38}" type="datetimeFigureOut">
               <a:rPr lang="ko-KR" altLang="en-US" smtClean="0"/>
-              <a:t>2025-07-05</a:t>
+              <a:t>2025-08-24</a:t>
             </a:fld>
             <a:endParaRPr lang="ko-KR" altLang="en-US"/>
           </a:p>
@@ -870,7 +870,7 @@
           <a:p>
             <a:fld id="{62DA3764-DD0C-4BFF-AAF9-73EA21321E38}" type="datetimeFigureOut">
               <a:rPr lang="ko-KR" altLang="en-US" smtClean="0"/>
-              <a:t>2025-07-05</a:t>
+              <a:t>2025-08-24</a:t>
             </a:fld>
             <a:endParaRPr lang="ko-KR" altLang="en-US"/>
           </a:p>
@@ -1145,7 +1145,7 @@
           <a:p>
             <a:fld id="{62DA3764-DD0C-4BFF-AAF9-73EA21321E38}" type="datetimeFigureOut">
               <a:rPr lang="ko-KR" altLang="en-US" smtClean="0"/>
-              <a:t>2025-07-05</a:t>
+              <a:t>2025-08-24</a:t>
             </a:fld>
             <a:endParaRPr lang="ko-KR" altLang="en-US"/>
           </a:p>
@@ -1410,7 +1410,7 @@
           <a:p>
             <a:fld id="{62DA3764-DD0C-4BFF-AAF9-73EA21321E38}" type="datetimeFigureOut">
               <a:rPr lang="ko-KR" altLang="en-US" smtClean="0"/>
-              <a:t>2025-07-05</a:t>
+              <a:t>2025-08-24</a:t>
             </a:fld>
             <a:endParaRPr lang="ko-KR" altLang="en-US"/>
           </a:p>
@@ -1822,7 +1822,7 @@
           <a:p>
             <a:fld id="{62DA3764-DD0C-4BFF-AAF9-73EA21321E38}" type="datetimeFigureOut">
               <a:rPr lang="ko-KR" altLang="en-US" smtClean="0"/>
-              <a:t>2025-07-05</a:t>
+              <a:t>2025-08-24</a:t>
             </a:fld>
             <a:endParaRPr lang="ko-KR" altLang="en-US"/>
           </a:p>
@@ -1963,7 +1963,7 @@
           <a:p>
             <a:fld id="{62DA3764-DD0C-4BFF-AAF9-73EA21321E38}" type="datetimeFigureOut">
               <a:rPr lang="ko-KR" altLang="en-US" smtClean="0"/>
-              <a:t>2025-07-05</a:t>
+              <a:t>2025-08-24</a:t>
             </a:fld>
             <a:endParaRPr lang="ko-KR" altLang="en-US"/>
           </a:p>
@@ -2076,7 +2076,7 @@
           <a:p>
             <a:fld id="{62DA3764-DD0C-4BFF-AAF9-73EA21321E38}" type="datetimeFigureOut">
               <a:rPr lang="ko-KR" altLang="en-US" smtClean="0"/>
-              <a:t>2025-07-05</a:t>
+              <a:t>2025-08-24</a:t>
             </a:fld>
             <a:endParaRPr lang="ko-KR" altLang="en-US"/>
           </a:p>
@@ -2387,7 +2387,7 @@
           <a:p>
             <a:fld id="{62DA3764-DD0C-4BFF-AAF9-73EA21321E38}" type="datetimeFigureOut">
               <a:rPr lang="ko-KR" altLang="en-US" smtClean="0"/>
-              <a:t>2025-07-05</a:t>
+              <a:t>2025-08-24</a:t>
             </a:fld>
             <a:endParaRPr lang="ko-KR" altLang="en-US"/>
           </a:p>
@@ -2675,7 +2675,7 @@
           <a:p>
             <a:fld id="{62DA3764-DD0C-4BFF-AAF9-73EA21321E38}" type="datetimeFigureOut">
               <a:rPr lang="ko-KR" altLang="en-US" smtClean="0"/>
-              <a:t>2025-07-05</a:t>
+              <a:t>2025-08-24</a:t>
             </a:fld>
             <a:endParaRPr lang="ko-KR" altLang="en-US"/>
           </a:p>
@@ -2916,7 +2916,7 @@
           <a:p>
             <a:fld id="{62DA3764-DD0C-4BFF-AAF9-73EA21321E38}" type="datetimeFigureOut">
               <a:rPr lang="ko-KR" altLang="en-US" smtClean="0"/>
-              <a:t>2025-07-05</a:t>
+              <a:t>2025-08-24</a:t>
             </a:fld>
             <a:endParaRPr lang="ko-KR" altLang="en-US"/>
           </a:p>
@@ -3971,19 +3971,17 @@
           </a:prstGeom>
         </p:spPr>
         <p:style>
-          <a:lnRef idx="2">
-            <a:schemeClr val="accent1">
-              <a:shade val="15000"/>
-            </a:schemeClr>
+          <a:lnRef idx="1">
+            <a:schemeClr val="accent2"/>
           </a:lnRef>
-          <a:fillRef idx="1">
-            <a:schemeClr val="accent1"/>
+          <a:fillRef idx="2">
+            <a:schemeClr val="accent2"/>
           </a:fillRef>
-          <a:effectRef idx="0">
-            <a:schemeClr val="accent1"/>
+          <a:effectRef idx="1">
+            <a:schemeClr val="accent2"/>
           </a:effectRef>
           <a:fontRef idx="minor">
-            <a:schemeClr val="lt1"/>
+            <a:schemeClr val="dk1"/>
           </a:fontRef>
         </p:style>
         <p:txBody>
@@ -3992,8 +3990,8 @@
           <a:p>
             <a:pPr algn="ctr"/>
             <a:r>
-              <a:rPr lang="en-US" altLang="ko-KR" dirty="0"/>
-              <a:t>Server</a:t>
+              <a:rPr lang="en-US" altLang="ko-KR" dirty="0" err="1"/>
+              <a:t>TitleServer</a:t>
             </a:r>
             <a:endParaRPr lang="ko-KR" altLang="en-US" dirty="0"/>
           </a:p>
@@ -4053,7 +4051,7 @@
         <p:spPr>
           <a:xfrm>
             <a:off x="2771553" y="1346791"/>
-            <a:ext cx="1947906" cy="369332"/>
+            <a:ext cx="2071336" cy="369332"/>
           </a:xfrm>
           <a:prstGeom prst="rect">
             <a:avLst/>
@@ -4068,7 +4066,7 @@
           <a:p>
             <a:r>
               <a:rPr lang="en-US" altLang="ko-KR" dirty="0" err="1"/>
-              <a:t>C_ServerListRead</a:t>
+              <a:t>CT_ServerListRead</a:t>
             </a:r>
             <a:endParaRPr lang="ko-KR" altLang="en-US" dirty="0"/>
           </a:p>
@@ -4130,7 +4128,7 @@
         <p:spPr>
           <a:xfrm>
             <a:off x="2771553" y="1984747"/>
-            <a:ext cx="1947906" cy="369332"/>
+            <a:ext cx="2050498" cy="369332"/>
           </a:xfrm>
           <a:prstGeom prst="rect">
             <a:avLst/>
@@ -4145,7 +4143,7 @@
           <a:p>
             <a:r>
               <a:rPr lang="en-US" altLang="ko-KR" dirty="0" err="1"/>
-              <a:t>S_ServerListRead</a:t>
+              <a:t>ST_ServerListRead</a:t>
             </a:r>
             <a:endParaRPr lang="ko-KR" altLang="en-US" dirty="0"/>
           </a:p>
@@ -4166,7 +4164,7 @@
         <p:spPr>
           <a:xfrm>
             <a:off x="524540" y="3429000"/>
-            <a:ext cx="7314759" cy="646331"/>
+            <a:ext cx="7489486" cy="923330"/>
           </a:xfrm>
           <a:prstGeom prst="rect">
             <a:avLst/>
@@ -4193,7 +4191,7 @@
             </a:r>
             <a:r>
               <a:rPr lang="en-US" altLang="ko-KR" dirty="0" err="1"/>
-              <a:t>C_ServerListRead</a:t>
+              <a:t>CT_ServerListRead</a:t>
             </a:r>
             <a:r>
               <a:rPr lang="en-US" altLang="ko-KR" dirty="0"/>
@@ -4206,6 +4204,45 @@
             <a:r>
               <a:rPr lang="en-US" altLang="ko-KR" dirty="0"/>
               <a:t>.</a:t>
+            </a:r>
+            <a:br>
+              <a:rPr lang="en-US" altLang="ko-KR" dirty="0"/>
+            </a:br>
+            <a:r>
+              <a:rPr lang="en-US" altLang="ko-KR" dirty="0"/>
+              <a:t>( </a:t>
+            </a:r>
+            <a:r>
+              <a:rPr lang="ko-KR" altLang="en-US" dirty="0"/>
+              <a:t>로컬 서버 체크가 </a:t>
+            </a:r>
+            <a:r>
+              <a:rPr lang="ko-KR" altLang="en-US" dirty="0" err="1"/>
+              <a:t>아닐경우</a:t>
+            </a:r>
+            <a:r>
+              <a:rPr lang="ko-KR" altLang="en-US" dirty="0"/>
+              <a:t> 무조건 정해진 </a:t>
+            </a:r>
+            <a:r>
+              <a:rPr lang="en-US" altLang="ko-KR" dirty="0"/>
+              <a:t>IP</a:t>
+            </a:r>
+            <a:r>
+              <a:rPr lang="ko-KR" altLang="en-US" dirty="0"/>
+              <a:t>의 </a:t>
+            </a:r>
+            <a:r>
+              <a:rPr lang="en-US" altLang="ko-KR" dirty="0"/>
+              <a:t>Title</a:t>
+            </a:r>
+            <a:r>
+              <a:rPr lang="ko-KR" altLang="en-US" dirty="0"/>
+              <a:t>서버로 연결 </a:t>
+            </a:r>
+            <a:r>
+              <a:rPr lang="en-US" altLang="ko-KR" dirty="0"/>
+              <a:t>)</a:t>
             </a:r>
             <a:endParaRPr lang="ko-KR" altLang="en-US" dirty="0"/>
           </a:p>
@@ -4397,19 +4434,17 @@
           </a:prstGeom>
         </p:spPr>
         <p:style>
-          <a:lnRef idx="2">
-            <a:schemeClr val="accent1">
-              <a:shade val="15000"/>
-            </a:schemeClr>
+          <a:lnRef idx="1">
+            <a:schemeClr val="accent2"/>
           </a:lnRef>
-          <a:fillRef idx="1">
-            <a:schemeClr val="accent1"/>
+          <a:fillRef idx="2">
+            <a:schemeClr val="accent2"/>
           </a:fillRef>
-          <a:effectRef idx="0">
-            <a:schemeClr val="accent1"/>
+          <a:effectRef idx="1">
+            <a:schemeClr val="accent2"/>
           </a:effectRef>
           <a:fontRef idx="minor">
-            <a:schemeClr val="lt1"/>
+            <a:schemeClr val="dk1"/>
           </a:fontRef>
         </p:style>
         <p:txBody>
@@ -4418,8 +4453,8 @@
           <a:p>
             <a:pPr algn="ctr"/>
             <a:r>
-              <a:rPr lang="en-US" altLang="ko-KR" dirty="0"/>
-              <a:t>Server</a:t>
+              <a:rPr lang="en-US" altLang="ko-KR" dirty="0" err="1"/>
+              <a:t>TitleServer</a:t>
             </a:r>
             <a:endParaRPr lang="ko-KR" altLang="en-US" dirty="0"/>
           </a:p>
@@ -4479,7 +4514,7 @@
         <p:spPr>
           <a:xfrm>
             <a:off x="2771553" y="1346791"/>
-            <a:ext cx="1947906" cy="369332"/>
+            <a:ext cx="2071336" cy="369332"/>
           </a:xfrm>
           <a:prstGeom prst="rect">
             <a:avLst/>
@@ -4494,7 +4529,7 @@
           <a:p>
             <a:r>
               <a:rPr lang="en-US" altLang="ko-KR" dirty="0" err="1"/>
-              <a:t>C_ServerListRead</a:t>
+              <a:t>CT_ServerListRead</a:t>
             </a:r>
             <a:endParaRPr lang="ko-KR" altLang="en-US" dirty="0"/>
           </a:p>
@@ -4556,7 +4591,7 @@
         <p:spPr>
           <a:xfrm>
             <a:off x="2771553" y="1984747"/>
-            <a:ext cx="1947906" cy="369332"/>
+            <a:ext cx="2050498" cy="369332"/>
           </a:xfrm>
           <a:prstGeom prst="rect">
             <a:avLst/>
@@ -4571,7 +4606,7 @@
           <a:p>
             <a:r>
               <a:rPr lang="en-US" altLang="ko-KR" dirty="0" err="1"/>
-              <a:t>S_ServerListRead</a:t>
+              <a:t>ST_ServerListRead</a:t>
             </a:r>
             <a:endParaRPr lang="ko-KR" altLang="en-US" dirty="0"/>
           </a:p>
@@ -4719,11 +4754,13 @@
         </p:nvCxnSpPr>
         <p:spPr>
           <a:xfrm rot="16200000" flipH="1">
-            <a:off x="3755084" y="2344501"/>
-            <a:ext cx="991636" cy="1010792"/>
-          </a:xfrm>
-          <a:prstGeom prst="bentConnector2">
-            <a:avLst/>
+            <a:off x="3780732" y="2370149"/>
+            <a:ext cx="991636" cy="959496"/>
+          </a:xfrm>
+          <a:prstGeom prst="bentConnector3">
+            <a:avLst>
+              <a:gd name="adj1" fmla="val 50000"/>
+            </a:avLst>
           </a:prstGeom>
           <a:ln>
             <a:tailEnd type="triangle"/>
@@ -5286,7 +5323,7 @@
         <p:spPr>
           <a:xfrm>
             <a:off x="7074629" y="1036191"/>
-            <a:ext cx="4365234" cy="1477328"/>
+            <a:ext cx="4488665" cy="1477328"/>
           </a:xfrm>
           <a:prstGeom prst="rect">
             <a:avLst/>
@@ -5321,7 +5358,7 @@
             </a:pPr>
             <a:r>
               <a:rPr lang="en-US" altLang="ko-KR" dirty="0" err="1"/>
-              <a:t>S_ServerListRead</a:t>
+              <a:t>ST_ServerListRead</a:t>
             </a:r>
             <a:r>
               <a:rPr lang="ko-KR" altLang="en-US" dirty="0"/>
@@ -6150,7 +6187,7 @@
         <p:spPr>
           <a:xfrm>
             <a:off x="6911163" y="1036191"/>
-            <a:ext cx="5328766" cy="1200329"/>
+            <a:ext cx="4998869" cy="1477328"/>
           </a:xfrm>
           <a:prstGeom prst="rect">
             <a:avLst/>
@@ -6195,35 +6232,47 @@
             </a:r>
             <a:r>
               <a:rPr lang="ko-KR" altLang="en-US" dirty="0"/>
-              <a:t>로</a:t>
+              <a:t>로 다시 연결</a:t>
+            </a:r>
+            <a:br>
+              <a:rPr lang="en-US" altLang="ko-KR" dirty="0"/>
+            </a:br>
+            <a:r>
+              <a:rPr lang="en-US" altLang="ko-KR" dirty="0"/>
+              <a:t>(</a:t>
+            </a:r>
+            <a:r>
+              <a:rPr lang="ko-KR" altLang="en-US" dirty="0"/>
+              <a:t>현재 </a:t>
             </a:r>
             <a:r>
               <a:rPr lang="en-US" altLang="ko-KR" dirty="0" err="1"/>
-              <a:t>C_EnterLobby</a:t>
-            </a:r>
-            <a:endParaRPr lang="ko-KR" altLang="en-US" dirty="0"/>
-          </a:p>
-          <a:p>
+              <a:t>TitleServer</a:t>
+            </a:r>
             <a:r>
               <a:rPr lang="ko-KR" altLang="en-US" dirty="0"/>
-              <a:t> 전송 </a:t>
-            </a:r>
-            <a:r>
-              <a:rPr lang="en-US" altLang="ko-KR" dirty="0"/>
-              <a:t>( </a:t>
+              <a:t>에 </a:t>
+            </a:r>
+            <a:r>
+              <a:rPr lang="ko-KR" altLang="en-US" dirty="0" err="1"/>
+              <a:t>연결되어있으므로</a:t>
             </a:r>
             <a:r>
               <a:rPr lang="ko-KR" altLang="en-US" dirty="0"/>
-              <a:t>기존 방식 </a:t>
+              <a:t> 원하는 </a:t>
+            </a:r>
+            <a:endParaRPr lang="en-US" altLang="ko-KR" dirty="0"/>
+          </a:p>
+          <a:p>
+            <a:r>
+              <a:rPr lang="ko-KR" altLang="en-US" dirty="0"/>
+              <a:t>서버로 다시 연결 </a:t>
             </a:r>
             <a:r>
               <a:rPr lang="en-US" altLang="ko-KR" dirty="0"/>
               <a:t>)</a:t>
             </a:r>
-            <a:r>
-              <a:rPr lang="ko-KR" altLang="en-US" dirty="0"/>
-              <a:t> </a:t>
-            </a:r>
+            <a:endParaRPr lang="ko-KR" altLang="en-US" dirty="0"/>
           </a:p>
         </p:txBody>
       </p:sp>
